--- a/outputs/ophthalmology-batch-20261011/octa/slides_editable.pptx
+++ b/outputs/ophthalmology-batch-20261011/octa/slides_editable.pptx
@@ -620,7 +620,7 @@
           <a:lstStyle/>
           <a:p>
             <a:r>
-              <a:t>octa-04 OCTA采集：PLEX Elite 9000扫频OCTA；黄斑中心6×6-mm扫描。具体质量排除细则见补充材料，当前上传文件未附补充全文。</a:t>
+              <a:t>octa-04 OCTA采集：PLEX Elite 9000扫频OCTA；黄斑中心6 mm × 6 mm扫描。具体质量排除细则见补充材料，当前上传文件未附补充全文。</a:t>
             </a:r>
           </a:p>
           <a:p>
@@ -908,7 +908,7 @@
           <a:lstStyle/>
           <a:p>
             <a:r>
-              <a:t>octa-10 AUC不能作诊断阈值：论文未设计或充分赋能来建立临床可操作阈值；没有用于个体诊断的GCC/CCFD/VSD切点、预测时限或用药方案。</a:t>
+              <a:t>octa-10 AUC不能作诊断阈值：研究设计及统计效能不足以建立临床可操作阈值；没有用于个体诊断的GCC/CCFD/VSD切点、预测时限或用药方案。</a:t>
             </a:r>
           </a:p>
           <a:p>
@@ -1164,7 +1164,7 @@
           <a:p/>
           <a:p>
             <a:r>
-              <a:t>octa-04 OCTA采集：PLEX Elite 9000扫频OCTA；黄斑中心6×6-mm扫描。具体质量排除细则见补充材料，当前上传文件未附补充全文。</a:t>
+              <a:t>octa-04 OCTA采集：PLEX Elite 9000扫频OCTA；黄斑中心6 mm × 6 mm扫描。具体质量排除细则见补充材料，当前上传文件未附补充全文。</a:t>
             </a:r>
           </a:p>
           <a:p>
@@ -1244,7 +1244,7 @@
           <a:p/>
           <a:p>
             <a:r>
-              <a:t>octa-10 AUC不能作诊断阈值：论文未设计或充分赋能来建立临床可操作阈值；没有用于个体诊断的GCC/CCFD/VSD切点、预测时限或用药方案。</a:t>
+              <a:t>octa-10 AUC不能作诊断阈值：研究设计及统计效能不足以建立临床可操作阈值；没有用于个体诊断的GCC/CCFD/VSD切点、预测时限或用药方案。</a:t>
             </a:r>
           </a:p>
           <a:p>
@@ -5605,7 +5605,7 @@
       </p:sp>
       <p:sp>
         <p:nvSpPr>
-          <p:cNvPr id="9" name="PLEX Elite 9000扫频OCTA；黄斑中心6×6-mm扫描。具体质量排除细则见补充材料，当"/>
+          <p:cNvPr id="9" name="PLEX Elite 9000扫频OCTA；黄斑中心6 mm × 6 mm扫描。具体质量排除细则见补"/>
           <p:cNvSpPr txBox="1"/>
           <p:nvPr/>
         </p:nvSpPr>
@@ -5645,7 +5645,7 @@
                 <a:ea typeface="Microsoft YaHei"/>
                 <a:cs typeface="Microsoft YaHei"/>
               </a:rPr>
-              <a:t>PLEX Elite 9000扫频OCTA；黄斑中心6×6-mm扫描。具体质量排除细则见补充材料，当前上传文件未</a:t>
+              <a:t>PLEX Elite 9000扫频OCTA；黄斑中心6 mm × 6 mm扫描。具体质量排除细则见补充材料，当前上传</a:t>
             </a:r>
           </a:p>
           <a:p>
@@ -5669,7 +5669,7 @@
                 <a:ea typeface="Microsoft YaHei"/>
                 <a:cs typeface="Microsoft YaHei"/>
               </a:rPr>
-              <a:t>附补充全文。</a:t>
+              <a:t>文件未附补充全文。</a:t>
             </a:r>
           </a:p>
         </p:txBody>
@@ -7894,7 +7894,7 @@
       </p:sp>
       <p:sp>
         <p:nvSpPr>
-          <p:cNvPr id="9" name="论文未设计或充分赋能来建立临床可操作阈值；没有用于个体诊断的GCC/CCFD/VSD切点、预测时限或"/>
+          <p:cNvPr id="9" name="研究设计及统计效能不足以建立临床可操作阈值；没有用于个体诊断的GCC/CCFD/VSD切点、预测时限"/>
           <p:cNvSpPr txBox="1"/>
           <p:nvPr/>
         </p:nvSpPr>
@@ -7934,7 +7934,7 @@
                 <a:ea typeface="Microsoft YaHei"/>
                 <a:cs typeface="Microsoft YaHei"/>
               </a:rPr>
-              <a:t>论文未设计或充分赋能来建立临床可操作阈值；没有用于个体诊断的GCC/CCFD/VSD切点、预测时限</a:t>
+              <a:t>研究设计及统计效能不足以建立临床可操作阈值；没有用于个体诊断的GCC/CCFD/VSD切点、预测时</a:t>
             </a:r>
           </a:p>
           <a:p>
@@ -7958,7 +7958,7 @@
                 <a:ea typeface="Microsoft YaHei"/>
                 <a:cs typeface="Microsoft YaHei"/>
               </a:rPr>
-              <a:t>或用药方案。</a:t>
+              <a:t>限或用药方案。</a:t>
             </a:r>
           </a:p>
         </p:txBody>
@@ -9803,7 +9803,7 @@
       </p:sp>
       <p:sp>
         <p:nvSpPr>
-          <p:cNvPr id="12" name="ADRC老年研究人群、SS-OCTA 6×6-mm；超出该场景 → 外推有效性未明确。"/>
+          <p:cNvPr id="12" name="ADRC老年研究人群、SS-OCTA 6 mm × 6 mm；超出该场景 → 外推有效性未明确。"/>
           <p:cNvSpPr txBox="1"/>
           <p:nvPr/>
         </p:nvSpPr>
@@ -9843,7 +9843,7 @@
                 <a:ea typeface="Microsoft YaHei"/>
                 <a:cs typeface="Microsoft YaHei"/>
               </a:rPr>
-              <a:t>ADRC老年研究人群、SS-OCTA 6×6-mm；超出该场景 → 外推</a:t>
+              <a:t>ADRC老年研究人群、SS-OCTA 6 mm × 6 mm；超出该场景 →</a:t>
             </a:r>
           </a:p>
           <a:p>
@@ -9867,7 +9867,7 @@
                 <a:ea typeface="Microsoft YaHei"/>
                 <a:cs typeface="Microsoft YaHei"/>
               </a:rPr>
-              <a:t>有效性未明确。</a:t>
+              <a:t>外推有效性未明确。</a:t>
             </a:r>
           </a:p>
         </p:txBody>
